--- a/skills/beautiful-slides/charts/kpi/example-playful-marketing.pptx
+++ b/skills/beautiful-slides/charts/kpi/example-playful-marketing.pptx
@@ -3133,7 +3133,50 @@
       </p:sp>
       <p:sp>
         <p:nvSpPr>
-          <p:cNvPr id="3" name="Rounded Rectangle 2"/>
+          <p:cNvPr id="3" name="Rectangle 2"/>
+          <p:cNvSpPr/>
+          <p:nvPr/>
+        </p:nvSpPr>
+        <p:spPr>
+          <a:xfrm>
+            <a:off x="731501" y="1508760"/>
+            <a:ext cx="3332397" cy="3291840"/>
+          </a:xfrm>
+          <a:prstGeom prst="rect">
+            <a:avLst/>
+          </a:prstGeom>
+          <a:solidFill>
+            <a:srgbClr val="FFF4EB"/>
+          </a:solidFill>
+          <a:ln>
+            <a:noFill/>
+          </a:ln>
+        </p:spPr>
+        <p:style>
+          <a:lnRef idx="1">
+            <a:schemeClr val="accent1"/>
+          </a:lnRef>
+          <a:fillRef idx="3">
+            <a:schemeClr val="accent1"/>
+          </a:fillRef>
+          <a:effectRef idx="2">
+            <a:schemeClr val="accent1"/>
+          </a:effectRef>
+          <a:fontRef idx="minor">
+            <a:schemeClr val="lt1"/>
+          </a:fontRef>
+        </p:style>
+        <p:txBody>
+          <a:bodyPr rtlCol="0" anchor="ctr"/>
+          <a:lstStyle/>
+          <a:p>
+            <a:pPr algn="ctr"/>
+          </a:p>
+        </p:txBody>
+      </p:sp>
+      <p:sp>
+        <p:nvSpPr>
+          <p:cNvPr id="4" name="Rounded Rectangle 3"/>
           <p:cNvSpPr/>
           <p:nvPr/>
         </p:nvSpPr>
@@ -3181,7 +3224,7 @@
       </p:sp>
       <p:sp>
         <p:nvSpPr>
-          <p:cNvPr id="4" name="TextBox 3"/>
+          <p:cNvPr id="5" name="TextBox 4"/>
           <p:cNvSpPr txBox="1"/>
           <p:nvPr/>
         </p:nvSpPr>
@@ -3205,7 +3248,7 @@
             <a:r>
               <a:rPr sz="1400" b="1">
                 <a:solidFill>
-                  <a:srgbClr val="6E6A73"/>
+                  <a:srgbClr val="1B1B1F"/>
                 </a:solidFill>
                 <a:latin typeface="Plus Jakarta Sans"/>
               </a:rPr>
@@ -3216,7 +3259,7 @@
       </p:sp>
       <p:sp>
         <p:nvSpPr>
-          <p:cNvPr id="5" name="TextBox 4"/>
+          <p:cNvPr id="6" name="TextBox 5"/>
           <p:cNvSpPr txBox="1"/>
           <p:nvPr/>
         </p:nvSpPr>
@@ -3251,14 +3294,14 @@
       </p:sp>
       <p:sp>
         <p:nvSpPr>
-          <p:cNvPr id="6" name="TextBox 5"/>
+          <p:cNvPr id="7" name="TextBox 6"/>
           <p:cNvSpPr txBox="1"/>
           <p:nvPr/>
         </p:nvSpPr>
         <p:spPr>
           <a:xfrm>
             <a:off x="964768" y="3077565"/>
-            <a:ext cx="2865863" cy="323850"/>
+            <a:ext cx="2865863" cy="285750"/>
           </a:xfrm>
           <a:prstGeom prst="rect">
             <a:avLst/>
@@ -3273,7 +3316,7 @@
           <a:p>
             <a:pPr algn="l"/>
             <a:r>
-              <a:rPr sz="1700" b="0">
+              <a:rPr sz="1500" b="0">
                 <a:solidFill>
                   <a:srgbClr val="0AB39C"/>
                 </a:solidFill>
@@ -3286,7 +3329,7 @@
       </p:sp>
       <p:sp>
         <p:nvSpPr>
-          <p:cNvPr id="7" name="TextBox 6"/>
+          <p:cNvPr id="8" name="TextBox 7"/>
           <p:cNvSpPr txBox="1"/>
           <p:nvPr/>
         </p:nvSpPr>
@@ -3310,7 +3353,7 @@
             <a:r>
               <a:rPr sz="1200" b="0">
                 <a:solidFill>
-                  <a:srgbClr val="6E6A73"/>
+                  <a:srgbClr val="1B1B1F"/>
                 </a:solidFill>
                 <a:latin typeface="Plus Jakarta Sans"/>
               </a:rPr>
@@ -3321,7 +3364,50 @@
       </p:sp>
       <p:sp>
         <p:nvSpPr>
-          <p:cNvPr id="8" name="Rounded Rectangle 7"/>
+          <p:cNvPr id="9" name="Rectangle 8"/>
+          <p:cNvSpPr/>
+          <p:nvPr/>
+        </p:nvSpPr>
+        <p:spPr>
+          <a:xfrm>
+            <a:off x="4429648" y="1508760"/>
+            <a:ext cx="3332397" cy="3291840"/>
+          </a:xfrm>
+          <a:prstGeom prst="rect">
+            <a:avLst/>
+          </a:prstGeom>
+          <a:solidFill>
+            <a:srgbClr val="FFF4EB"/>
+          </a:solidFill>
+          <a:ln>
+            <a:noFill/>
+          </a:ln>
+        </p:spPr>
+        <p:style>
+          <a:lnRef idx="1">
+            <a:schemeClr val="accent1"/>
+          </a:lnRef>
+          <a:fillRef idx="3">
+            <a:schemeClr val="accent1"/>
+          </a:fillRef>
+          <a:effectRef idx="2">
+            <a:schemeClr val="accent1"/>
+          </a:effectRef>
+          <a:fontRef idx="minor">
+            <a:schemeClr val="lt1"/>
+          </a:fontRef>
+        </p:style>
+        <p:txBody>
+          <a:bodyPr rtlCol="0" anchor="ctr"/>
+          <a:lstStyle/>
+          <a:p>
+            <a:pPr algn="ctr"/>
+          </a:p>
+        </p:txBody>
+      </p:sp>
+      <p:sp>
+        <p:nvSpPr>
+          <p:cNvPr id="10" name="Rounded Rectangle 9"/>
           <p:cNvSpPr/>
           <p:nvPr/>
         </p:nvSpPr>
@@ -3369,7 +3455,7 @@
       </p:sp>
       <p:sp>
         <p:nvSpPr>
-          <p:cNvPr id="9" name="TextBox 8"/>
+          <p:cNvPr id="11" name="TextBox 10"/>
           <p:cNvSpPr txBox="1"/>
           <p:nvPr/>
         </p:nvSpPr>
@@ -3393,7 +3479,7 @@
             <a:r>
               <a:rPr sz="1400" b="1">
                 <a:solidFill>
-                  <a:srgbClr val="6E6A73"/>
+                  <a:srgbClr val="1B1B1F"/>
                 </a:solidFill>
                 <a:latin typeface="Plus Jakarta Sans"/>
               </a:rPr>
@@ -3404,7 +3490,7 @@
       </p:sp>
       <p:sp>
         <p:nvSpPr>
-          <p:cNvPr id="10" name="TextBox 9"/>
+          <p:cNvPr id="12" name="TextBox 11"/>
           <p:cNvSpPr txBox="1"/>
           <p:nvPr/>
         </p:nvSpPr>
@@ -3439,7 +3525,7 @@
       </p:sp>
       <p:sp>
         <p:nvSpPr>
-          <p:cNvPr id="11" name="TextBox 10"/>
+          <p:cNvPr id="13" name="TextBox 12"/>
           <p:cNvSpPr txBox="1"/>
           <p:nvPr/>
         </p:nvSpPr>
@@ -3474,7 +3560,7 @@
       </p:sp>
       <p:sp>
         <p:nvSpPr>
-          <p:cNvPr id="12" name="TextBox 11"/>
+          <p:cNvPr id="14" name="TextBox 13"/>
           <p:cNvSpPr txBox="1"/>
           <p:nvPr/>
         </p:nvSpPr>
@@ -3498,7 +3584,7 @@
             <a:r>
               <a:rPr sz="1200" b="0">
                 <a:solidFill>
-                  <a:srgbClr val="6E6A73"/>
+                  <a:srgbClr val="1B1B1F"/>
                 </a:solidFill>
                 <a:latin typeface="Plus Jakarta Sans"/>
               </a:rPr>
@@ -3509,7 +3595,50 @@
       </p:sp>
       <p:sp>
         <p:nvSpPr>
-          <p:cNvPr id="13" name="Rounded Rectangle 12"/>
+          <p:cNvPr id="15" name="Rectangle 14"/>
+          <p:cNvSpPr/>
+          <p:nvPr/>
+        </p:nvSpPr>
+        <p:spPr>
+          <a:xfrm>
+            <a:off x="8127795" y="1508760"/>
+            <a:ext cx="3332397" cy="3291840"/>
+          </a:xfrm>
+          <a:prstGeom prst="rect">
+            <a:avLst/>
+          </a:prstGeom>
+          <a:solidFill>
+            <a:srgbClr val="FFF4EB"/>
+          </a:solidFill>
+          <a:ln>
+            <a:noFill/>
+          </a:ln>
+        </p:spPr>
+        <p:style>
+          <a:lnRef idx="1">
+            <a:schemeClr val="accent1"/>
+          </a:lnRef>
+          <a:fillRef idx="3">
+            <a:schemeClr val="accent1"/>
+          </a:fillRef>
+          <a:effectRef idx="2">
+            <a:schemeClr val="accent1"/>
+          </a:effectRef>
+          <a:fontRef idx="minor">
+            <a:schemeClr val="lt1"/>
+          </a:fontRef>
+        </p:style>
+        <p:txBody>
+          <a:bodyPr rtlCol="0" anchor="ctr"/>
+          <a:lstStyle/>
+          <a:p>
+            <a:pPr algn="ctr"/>
+          </a:p>
+        </p:txBody>
+      </p:sp>
+      <p:sp>
+        <p:nvSpPr>
+          <p:cNvPr id="16" name="Rounded Rectangle 15"/>
           <p:cNvSpPr/>
           <p:nvPr/>
         </p:nvSpPr>
@@ -3557,7 +3686,7 @@
       </p:sp>
       <p:sp>
         <p:nvSpPr>
-          <p:cNvPr id="14" name="TextBox 13"/>
+          <p:cNvPr id="17" name="TextBox 16"/>
           <p:cNvSpPr txBox="1"/>
           <p:nvPr/>
         </p:nvSpPr>
@@ -3581,7 +3710,7 @@
             <a:r>
               <a:rPr sz="1400" b="1">
                 <a:solidFill>
-                  <a:srgbClr val="6E6A73"/>
+                  <a:srgbClr val="1B1B1F"/>
                 </a:solidFill>
                 <a:latin typeface="Plus Jakarta Sans"/>
               </a:rPr>
@@ -3592,7 +3721,7 @@
       </p:sp>
       <p:sp>
         <p:nvSpPr>
-          <p:cNvPr id="15" name="TextBox 14"/>
+          <p:cNvPr id="18" name="TextBox 17"/>
           <p:cNvSpPr txBox="1"/>
           <p:nvPr/>
         </p:nvSpPr>
@@ -3627,7 +3756,7 @@
       </p:sp>
       <p:sp>
         <p:nvSpPr>
-          <p:cNvPr id="16" name="TextBox 15"/>
+          <p:cNvPr id="19" name="TextBox 18"/>
           <p:cNvSpPr txBox="1"/>
           <p:nvPr/>
         </p:nvSpPr>
@@ -3662,7 +3791,7 @@
       </p:sp>
       <p:sp>
         <p:nvSpPr>
-          <p:cNvPr id="17" name="TextBox 16"/>
+          <p:cNvPr id="20" name="TextBox 19"/>
           <p:cNvSpPr txBox="1"/>
           <p:nvPr/>
         </p:nvSpPr>
@@ -3686,7 +3815,7 @@
             <a:r>
               <a:rPr sz="1200" b="0">
                 <a:solidFill>
-                  <a:srgbClr val="6E6A73"/>
+                  <a:srgbClr val="1B1B1F"/>
                 </a:solidFill>
                 <a:latin typeface="Plus Jakarta Sans"/>
               </a:rPr>
